--- a/assets/figures-editable/appendix-studies/a-e16.pptx
+++ b/assets/figures-editable/appendix-studies/a-e16.pptx
@@ -7,7 +7,7 @@
   <p:sldIdLst>
     <p:sldId id="256" r:id="rId7"/>
   </p:sldIdLst>
-  <p:sldSz cx="8961120" cy="5239512" type="screen4x3"/>
+  <p:sldSz cx="12191695" cy="6858000" type="screen4x3"/>
   <p:notesSz cx="6858000" cy="9144000"/>
   <p:defaultTextStyle>
     <a:defPPr>
@@ -3098,14 +3098,14 @@
       <p:grpSpPr/>
       <p:sp>
         <p:nvSpPr>
-          <p:cNvPr id="2" name="text 0" descr="sci-ppt:obj-000"/>
+          <p:cNvPr id="2" name="A-E16 text 0" descr="sci-ppt:o000"/>
           <p:cNvSpPr txBox="1"/>
           <p:nvPr/>
         </p:nvSpPr>
         <p:spPr>
           <a:xfrm>
-            <a:off x="256032" y="137160"/>
-            <a:ext cx="7315200" cy="310896"/>
+            <a:off x="274320" y="118872"/>
+            <a:ext cx="11612880" cy="340105"/>
           </a:xfrm>
           <a:prstGeom prst="rect">
             <a:avLst/>
@@ -3114,7 +3114,7 @@
           <a:effectLst/>
         </p:spPr>
         <p:txBody>
-          <a:bodyPr wrap="none" lIns="0" rIns="0" tIns="0" bIns="0" anchor="ctr">
+          <a:bodyPr wrap="none" lIns="18288" rIns="18288" tIns="18288" bIns="18288" anchor="t">
             <a:spAutoFit/>
           </a:bodyPr>
           <a:lstStyle/>
@@ -3125,27 +3125,27 @@
               </a:spcAft>
             </a:pPr>
             <a:r>
-              <a:rPr sz="1439" b="0" i="0">
+              <a:rPr sz="1900" b="1" i="0">
                 <a:solidFill>
                   <a:srgbClr val="8EDBD4"/>
                 </a:solidFill>
                 <a:latin typeface="Arial"/>
               </a:rPr>
-              <a:t>A-E16 · Physical variable map</a:t>
-            </a:r>
-          </a:p>
-        </p:txBody>
-      </p:sp>
-      <p:sp>
-        <p:nvSpPr>
-          <p:cNvPr id="3" name="text 1" descr="sci-ppt:obj-001"/>
+              <a:t>A-E16 · Response-time definition</a:t>
+            </a:r>
+          </a:p>
+        </p:txBody>
+      </p:sp>
+      <p:sp>
+        <p:nvSpPr>
+          <p:cNvPr id="3" name="A-E16 text 1" descr="sci-ppt:o001"/>
           <p:cNvSpPr txBox="1"/>
           <p:nvPr/>
         </p:nvSpPr>
         <p:spPr>
           <a:xfrm>
-            <a:off x="905256" y="612648"/>
-            <a:ext cx="7498079" cy="310896"/>
+            <a:off x="457200" y="914400"/>
+            <a:ext cx="11247120" cy="254889"/>
           </a:xfrm>
           <a:prstGeom prst="rect">
             <a:avLst/>
@@ -3154,7 +3154,7 @@
           <a:effectLst/>
         </p:spPr>
         <p:txBody>
-          <a:bodyPr wrap="none" lIns="0" rIns="0" tIns="0" bIns="0" anchor="ctr">
+          <a:bodyPr wrap="none" lIns="18288" rIns="18288" tIns="18288" bIns="18288" anchor="t">
             <a:spAutoFit/>
           </a:bodyPr>
           <a:lstStyle/>
@@ -3165,37 +3165,1955 @@
               </a:spcAft>
             </a:pPr>
             <a:r>
-              <a:rPr sz="1296" b="0" i="0">
+              <a:rPr sz="1350" b="1" i="0">
+                <a:solidFill>
+                  <a:srgbClr val="8EDBD4"/>
+                </a:solidFill>
+                <a:latin typeface="Arial"/>
+              </a:rPr>
+              <a:t>Deborah number: relaxation time against event duration</a:t>
+            </a:r>
+          </a:p>
+        </p:txBody>
+      </p:sp>
+      <p:sp>
+        <p:nvSpPr>
+          <p:cNvPr id="4" name="A-E16 text 2" descr="sci-ppt:o002"/>
+          <p:cNvSpPr txBox="1"/>
+          <p:nvPr/>
+        </p:nvSpPr>
+        <p:spPr>
+          <a:xfrm>
+            <a:off x="457200" y="1371600"/>
+            <a:ext cx="11247120" cy="386588"/>
+          </a:xfrm>
+          <a:prstGeom prst="rect">
+            <a:avLst/>
+          </a:prstGeom>
+          <a:noFill/>
+          <a:effectLst/>
+        </p:spPr>
+        <p:txBody>
+          <a:bodyPr wrap="none" lIns="18288" rIns="18288" tIns="18288" bIns="18288" anchor="t">
+            <a:spAutoFit/>
+          </a:bodyPr>
+          <a:lstStyle/>
+          <a:p>
+            <a:pPr algn="ctr">
+              <a:spcAft>
+                <a:spcPts val="0"/>
+              </a:spcAft>
+            </a:pPr>
+            <a:r>
+              <a:rPr sz="2200" b="1" i="0">
                 <a:solidFill>
                   <a:srgbClr val="E7F0F3"/>
                 </a:solidFill>
                 <a:latin typeface="Arial"/>
               </a:rPr>
-              <a:t>Response times and dimensionless comparisons</a:t>
-            </a:r>
-          </a:p>
-        </p:txBody>
-      </p:sp>
-      <p:sp>
-        <p:nvSpPr>
-          <p:cNvPr id="4" name="rect 2" descr="sci-ppt:obj-002"/>
+              <a:t>De = τᵣₑₗ / τₑ</a:t>
+            </a:r>
+          </a:p>
+        </p:txBody>
+      </p:sp>
+      <p:cxnSp>
+        <p:nvCxnSpPr>
+          <p:cNvPr id="5" name="A-E16 line 3" descr="sci-ppt:o003"/>
+          <p:cNvCxnSpPr/>
+          <p:nvPr/>
+        </p:nvCxnSpPr>
+        <p:spPr>
+          <a:xfrm>
+            <a:off x="914400" y="4480560"/>
+            <a:ext cx="6766560" cy="0"/>
+          </a:xfrm>
+          <a:prstGeom prst="line">
+            <a:avLst/>
+          </a:prstGeom>
+          <a:ln w="19050">
+            <a:solidFill>
+              <a:srgbClr val="B4C7D2"/>
+            </a:solidFill>
+          </a:ln>
+          <a:effectLst/>
+        </p:spPr>
+      </p:cxnSp>
+      <p:cxnSp>
+        <p:nvCxnSpPr>
+          <p:cNvPr id="6" name="A-E16 line 4" descr="sci-ppt:o004"/>
+          <p:cNvCxnSpPr/>
+          <p:nvPr/>
+        </p:nvCxnSpPr>
+        <p:spPr>
+          <a:xfrm>
+            <a:off x="914400" y="2103120"/>
+            <a:ext cx="0" cy="2377440"/>
+          </a:xfrm>
+          <a:prstGeom prst="line">
+            <a:avLst/>
+          </a:prstGeom>
+          <a:ln w="19050">
+            <a:solidFill>
+              <a:srgbClr val="B4C7D2"/>
+            </a:solidFill>
+          </a:ln>
+          <a:effectLst/>
+        </p:spPr>
+      </p:cxnSp>
+      <p:cxnSp>
+        <p:nvCxnSpPr>
+          <p:cNvPr id="7" name="A-E16 line 5" descr="sci-ppt:o005"/>
+          <p:cNvCxnSpPr/>
+          <p:nvPr/>
+        </p:nvCxnSpPr>
+        <p:spPr>
+          <a:xfrm>
+            <a:off x="914400" y="4480560"/>
+            <a:ext cx="0" cy="64008"/>
+          </a:xfrm>
+          <a:prstGeom prst="line">
+            <a:avLst/>
+          </a:prstGeom>
+          <a:ln w="12700">
+            <a:solidFill>
+              <a:srgbClr val="B4C7D2"/>
+            </a:solidFill>
+          </a:ln>
+          <a:effectLst/>
+        </p:spPr>
+      </p:cxnSp>
+      <p:cxnSp>
+        <p:nvCxnSpPr>
+          <p:cNvPr id="8" name="A-E16 line 6" descr="sci-ppt:o006"/>
+          <p:cNvCxnSpPr/>
+          <p:nvPr/>
+        </p:nvCxnSpPr>
+        <p:spPr>
+          <a:xfrm>
+            <a:off x="914400" y="2103120"/>
+            <a:ext cx="0" cy="2377440"/>
+          </a:xfrm>
+          <a:prstGeom prst="line">
+            <a:avLst/>
+          </a:prstGeom>
+          <a:ln w="7620">
+            <a:solidFill>
+              <a:srgbClr val="2E4756"/>
+            </a:solidFill>
+          </a:ln>
+          <a:effectLst/>
+        </p:spPr>
+      </p:cxnSp>
+      <p:sp>
+        <p:nvSpPr>
+          <p:cNvPr id="9" name="A-E16 text 7" descr="sci-ppt:o007"/>
+          <p:cNvSpPr txBox="1"/>
+          <p:nvPr/>
+        </p:nvSpPr>
+        <p:spPr>
+          <a:xfrm>
+            <a:off x="457200" y="4562856"/>
+            <a:ext cx="914400" cy="208407"/>
+          </a:xfrm>
+          <a:prstGeom prst="rect">
+            <a:avLst/>
+          </a:prstGeom>
+          <a:noFill/>
+          <a:effectLst/>
+        </p:spPr>
+        <p:txBody>
+          <a:bodyPr wrap="none" lIns="18288" rIns="18288" tIns="18288" bIns="18288" anchor="t">
+            <a:spAutoFit/>
+          </a:bodyPr>
+          <a:lstStyle/>
+          <a:p>
+            <a:pPr algn="ctr">
+              <a:spcAft>
+                <a:spcPts val="0"/>
+              </a:spcAft>
+            </a:pPr>
+            <a:r>
+              <a:rPr sz="1050" b="0" i="0">
+                <a:solidFill>
+                  <a:srgbClr val="B4C7D2"/>
+                </a:solidFill>
+                <a:latin typeface="Arial"/>
+              </a:rPr>
+              <a:t>0.001</a:t>
+            </a:r>
+          </a:p>
+        </p:txBody>
+      </p:sp>
+      <p:cxnSp>
+        <p:nvCxnSpPr>
+          <p:cNvPr id="10" name="A-E16 line 8" descr="sci-ppt:o008"/>
+          <p:cNvCxnSpPr/>
+          <p:nvPr/>
+        </p:nvCxnSpPr>
+        <p:spPr>
+          <a:xfrm>
+            <a:off x="2042160" y="4480560"/>
+            <a:ext cx="0" cy="64008"/>
+          </a:xfrm>
+          <a:prstGeom prst="line">
+            <a:avLst/>
+          </a:prstGeom>
+          <a:ln w="12700">
+            <a:solidFill>
+              <a:srgbClr val="B4C7D2"/>
+            </a:solidFill>
+          </a:ln>
+          <a:effectLst/>
+        </p:spPr>
+      </p:cxnSp>
+      <p:cxnSp>
+        <p:nvCxnSpPr>
+          <p:cNvPr id="11" name="A-E16 line 9" descr="sci-ppt:o009"/>
+          <p:cNvCxnSpPr/>
+          <p:nvPr/>
+        </p:nvCxnSpPr>
+        <p:spPr>
+          <a:xfrm>
+            <a:off x="2042160" y="2103120"/>
+            <a:ext cx="0" cy="2377440"/>
+          </a:xfrm>
+          <a:prstGeom prst="line">
+            <a:avLst/>
+          </a:prstGeom>
+          <a:ln w="7620">
+            <a:solidFill>
+              <a:srgbClr val="2E4756"/>
+            </a:solidFill>
+          </a:ln>
+          <a:effectLst/>
+        </p:spPr>
+      </p:cxnSp>
+      <p:sp>
+        <p:nvSpPr>
+          <p:cNvPr id="12" name="A-E16 text 10" descr="sci-ppt:o010"/>
+          <p:cNvSpPr txBox="1"/>
+          <p:nvPr/>
+        </p:nvSpPr>
+        <p:spPr>
+          <a:xfrm>
+            <a:off x="1584960" y="4562856"/>
+            <a:ext cx="914400" cy="208407"/>
+          </a:xfrm>
+          <a:prstGeom prst="rect">
+            <a:avLst/>
+          </a:prstGeom>
+          <a:noFill/>
+          <a:effectLst/>
+        </p:spPr>
+        <p:txBody>
+          <a:bodyPr wrap="none" lIns="18288" rIns="18288" tIns="18288" bIns="18288" anchor="t">
+            <a:spAutoFit/>
+          </a:bodyPr>
+          <a:lstStyle/>
+          <a:p>
+            <a:pPr algn="ctr">
+              <a:spcAft>
+                <a:spcPts val="0"/>
+              </a:spcAft>
+            </a:pPr>
+            <a:r>
+              <a:rPr sz="1050" b="0" i="0">
+                <a:solidFill>
+                  <a:srgbClr val="B4C7D2"/>
+                </a:solidFill>
+                <a:latin typeface="Arial"/>
+              </a:rPr>
+              <a:t>0.01</a:t>
+            </a:r>
+          </a:p>
+        </p:txBody>
+      </p:sp>
+      <p:cxnSp>
+        <p:nvCxnSpPr>
+          <p:cNvPr id="13" name="A-E16 line 11" descr="sci-ppt:o011"/>
+          <p:cNvCxnSpPr/>
+          <p:nvPr/>
+        </p:nvCxnSpPr>
+        <p:spPr>
+          <a:xfrm>
+            <a:off x="3169920" y="4480560"/>
+            <a:ext cx="0" cy="64008"/>
+          </a:xfrm>
+          <a:prstGeom prst="line">
+            <a:avLst/>
+          </a:prstGeom>
+          <a:ln w="12700">
+            <a:solidFill>
+              <a:srgbClr val="B4C7D2"/>
+            </a:solidFill>
+          </a:ln>
+          <a:effectLst/>
+        </p:spPr>
+      </p:cxnSp>
+      <p:cxnSp>
+        <p:nvCxnSpPr>
+          <p:cNvPr id="14" name="A-E16 line 12" descr="sci-ppt:o012"/>
+          <p:cNvCxnSpPr/>
+          <p:nvPr/>
+        </p:nvCxnSpPr>
+        <p:spPr>
+          <a:xfrm>
+            <a:off x="3169920" y="2103120"/>
+            <a:ext cx="0" cy="2377440"/>
+          </a:xfrm>
+          <a:prstGeom prst="line">
+            <a:avLst/>
+          </a:prstGeom>
+          <a:ln w="7620">
+            <a:solidFill>
+              <a:srgbClr val="2E4756"/>
+            </a:solidFill>
+          </a:ln>
+          <a:effectLst/>
+        </p:spPr>
+      </p:cxnSp>
+      <p:sp>
+        <p:nvSpPr>
+          <p:cNvPr id="15" name="A-E16 text 13" descr="sci-ppt:o013"/>
+          <p:cNvSpPr txBox="1"/>
+          <p:nvPr/>
+        </p:nvSpPr>
+        <p:spPr>
+          <a:xfrm>
+            <a:off x="2712720" y="4562856"/>
+            <a:ext cx="914400" cy="208407"/>
+          </a:xfrm>
+          <a:prstGeom prst="rect">
+            <a:avLst/>
+          </a:prstGeom>
+          <a:noFill/>
+          <a:effectLst/>
+        </p:spPr>
+        <p:txBody>
+          <a:bodyPr wrap="none" lIns="18288" rIns="18288" tIns="18288" bIns="18288" anchor="t">
+            <a:spAutoFit/>
+          </a:bodyPr>
+          <a:lstStyle/>
+          <a:p>
+            <a:pPr algn="ctr">
+              <a:spcAft>
+                <a:spcPts val="0"/>
+              </a:spcAft>
+            </a:pPr>
+            <a:r>
+              <a:rPr sz="1050" b="0" i="0">
+                <a:solidFill>
+                  <a:srgbClr val="B4C7D2"/>
+                </a:solidFill>
+                <a:latin typeface="Arial"/>
+              </a:rPr>
+              <a:t>0.1</a:t>
+            </a:r>
+          </a:p>
+        </p:txBody>
+      </p:sp>
+      <p:cxnSp>
+        <p:nvCxnSpPr>
+          <p:cNvPr id="16" name="A-E16 line 14" descr="sci-ppt:o014"/>
+          <p:cNvCxnSpPr/>
+          <p:nvPr/>
+        </p:nvCxnSpPr>
+        <p:spPr>
+          <a:xfrm>
+            <a:off x="4297680" y="4480560"/>
+            <a:ext cx="0" cy="64008"/>
+          </a:xfrm>
+          <a:prstGeom prst="line">
+            <a:avLst/>
+          </a:prstGeom>
+          <a:ln w="12700">
+            <a:solidFill>
+              <a:srgbClr val="B4C7D2"/>
+            </a:solidFill>
+          </a:ln>
+          <a:effectLst/>
+        </p:spPr>
+      </p:cxnSp>
+      <p:cxnSp>
+        <p:nvCxnSpPr>
+          <p:cNvPr id="17" name="A-E16 line 15" descr="sci-ppt:o015"/>
+          <p:cNvCxnSpPr/>
+          <p:nvPr/>
+        </p:nvCxnSpPr>
+        <p:spPr>
+          <a:xfrm>
+            <a:off x="4297680" y="2103120"/>
+            <a:ext cx="0" cy="2377440"/>
+          </a:xfrm>
+          <a:prstGeom prst="line">
+            <a:avLst/>
+          </a:prstGeom>
+          <a:ln w="7620">
+            <a:solidFill>
+              <a:srgbClr val="2E4756"/>
+            </a:solidFill>
+          </a:ln>
+          <a:effectLst/>
+        </p:spPr>
+      </p:cxnSp>
+      <p:sp>
+        <p:nvSpPr>
+          <p:cNvPr id="18" name="A-E16 text 16" descr="sci-ppt:o016"/>
+          <p:cNvSpPr txBox="1"/>
+          <p:nvPr/>
+        </p:nvSpPr>
+        <p:spPr>
+          <a:xfrm>
+            <a:off x="3840480" y="4562856"/>
+            <a:ext cx="914400" cy="208407"/>
+          </a:xfrm>
+          <a:prstGeom prst="rect">
+            <a:avLst/>
+          </a:prstGeom>
+          <a:noFill/>
+          <a:effectLst/>
+        </p:spPr>
+        <p:txBody>
+          <a:bodyPr wrap="none" lIns="18288" rIns="18288" tIns="18288" bIns="18288" anchor="t">
+            <a:spAutoFit/>
+          </a:bodyPr>
+          <a:lstStyle/>
+          <a:p>
+            <a:pPr algn="ctr">
+              <a:spcAft>
+                <a:spcPts val="0"/>
+              </a:spcAft>
+            </a:pPr>
+            <a:r>
+              <a:rPr sz="1050" b="0" i="0">
+                <a:solidFill>
+                  <a:srgbClr val="B4C7D2"/>
+                </a:solidFill>
+                <a:latin typeface="Arial"/>
+              </a:rPr>
+              <a:t>1</a:t>
+            </a:r>
+          </a:p>
+        </p:txBody>
+      </p:sp>
+      <p:cxnSp>
+        <p:nvCxnSpPr>
+          <p:cNvPr id="19" name="A-E16 line 17" descr="sci-ppt:o017"/>
+          <p:cNvCxnSpPr/>
+          <p:nvPr/>
+        </p:nvCxnSpPr>
+        <p:spPr>
+          <a:xfrm>
+            <a:off x="5425440" y="4480560"/>
+            <a:ext cx="0" cy="64008"/>
+          </a:xfrm>
+          <a:prstGeom prst="line">
+            <a:avLst/>
+          </a:prstGeom>
+          <a:ln w="12700">
+            <a:solidFill>
+              <a:srgbClr val="B4C7D2"/>
+            </a:solidFill>
+          </a:ln>
+          <a:effectLst/>
+        </p:spPr>
+      </p:cxnSp>
+      <p:cxnSp>
+        <p:nvCxnSpPr>
+          <p:cNvPr id="20" name="A-E16 line 18" descr="sci-ppt:o018"/>
+          <p:cNvCxnSpPr/>
+          <p:nvPr/>
+        </p:nvCxnSpPr>
+        <p:spPr>
+          <a:xfrm>
+            <a:off x="5425440" y="2103120"/>
+            <a:ext cx="0" cy="2377440"/>
+          </a:xfrm>
+          <a:prstGeom prst="line">
+            <a:avLst/>
+          </a:prstGeom>
+          <a:ln w="7620">
+            <a:solidFill>
+              <a:srgbClr val="2E4756"/>
+            </a:solidFill>
+          </a:ln>
+          <a:effectLst/>
+        </p:spPr>
+      </p:cxnSp>
+      <p:sp>
+        <p:nvSpPr>
+          <p:cNvPr id="21" name="A-E16 text 19" descr="sci-ppt:o019"/>
+          <p:cNvSpPr txBox="1"/>
+          <p:nvPr/>
+        </p:nvSpPr>
+        <p:spPr>
+          <a:xfrm>
+            <a:off x="4968240" y="4562856"/>
+            <a:ext cx="914400" cy="208407"/>
+          </a:xfrm>
+          <a:prstGeom prst="rect">
+            <a:avLst/>
+          </a:prstGeom>
+          <a:noFill/>
+          <a:effectLst/>
+        </p:spPr>
+        <p:txBody>
+          <a:bodyPr wrap="none" lIns="18288" rIns="18288" tIns="18288" bIns="18288" anchor="t">
+            <a:spAutoFit/>
+          </a:bodyPr>
+          <a:lstStyle/>
+          <a:p>
+            <a:pPr algn="ctr">
+              <a:spcAft>
+                <a:spcPts val="0"/>
+              </a:spcAft>
+            </a:pPr>
+            <a:r>
+              <a:rPr sz="1050" b="0" i="0">
+                <a:solidFill>
+                  <a:srgbClr val="B4C7D2"/>
+                </a:solidFill>
+                <a:latin typeface="Arial"/>
+              </a:rPr>
+              <a:t>10</a:t>
+            </a:r>
+          </a:p>
+        </p:txBody>
+      </p:sp>
+      <p:cxnSp>
+        <p:nvCxnSpPr>
+          <p:cNvPr id="22" name="A-E16 line 20" descr="sci-ppt:o020"/>
+          <p:cNvCxnSpPr/>
+          <p:nvPr/>
+        </p:nvCxnSpPr>
+        <p:spPr>
+          <a:xfrm>
+            <a:off x="6553200" y="4480560"/>
+            <a:ext cx="0" cy="64008"/>
+          </a:xfrm>
+          <a:prstGeom prst="line">
+            <a:avLst/>
+          </a:prstGeom>
+          <a:ln w="12700">
+            <a:solidFill>
+              <a:srgbClr val="B4C7D2"/>
+            </a:solidFill>
+          </a:ln>
+          <a:effectLst/>
+        </p:spPr>
+      </p:cxnSp>
+      <p:cxnSp>
+        <p:nvCxnSpPr>
+          <p:cNvPr id="23" name="A-E16 line 21" descr="sci-ppt:o021"/>
+          <p:cNvCxnSpPr/>
+          <p:nvPr/>
+        </p:nvCxnSpPr>
+        <p:spPr>
+          <a:xfrm>
+            <a:off x="6553200" y="2103120"/>
+            <a:ext cx="0" cy="2377440"/>
+          </a:xfrm>
+          <a:prstGeom prst="line">
+            <a:avLst/>
+          </a:prstGeom>
+          <a:ln w="7620">
+            <a:solidFill>
+              <a:srgbClr val="2E4756"/>
+            </a:solidFill>
+          </a:ln>
+          <a:effectLst/>
+        </p:spPr>
+      </p:cxnSp>
+      <p:sp>
+        <p:nvSpPr>
+          <p:cNvPr id="24" name="A-E16 text 22" descr="sci-ppt:o022"/>
+          <p:cNvSpPr txBox="1"/>
+          <p:nvPr/>
+        </p:nvSpPr>
+        <p:spPr>
+          <a:xfrm>
+            <a:off x="6096000" y="4562856"/>
+            <a:ext cx="914400" cy="208407"/>
+          </a:xfrm>
+          <a:prstGeom prst="rect">
+            <a:avLst/>
+          </a:prstGeom>
+          <a:noFill/>
+          <a:effectLst/>
+        </p:spPr>
+        <p:txBody>
+          <a:bodyPr wrap="none" lIns="18288" rIns="18288" tIns="18288" bIns="18288" anchor="t">
+            <a:spAutoFit/>
+          </a:bodyPr>
+          <a:lstStyle/>
+          <a:p>
+            <a:pPr algn="ctr">
+              <a:spcAft>
+                <a:spcPts val="0"/>
+              </a:spcAft>
+            </a:pPr>
+            <a:r>
+              <a:rPr sz="1050" b="0" i="0">
+                <a:solidFill>
+                  <a:srgbClr val="B4C7D2"/>
+                </a:solidFill>
+                <a:latin typeface="Arial"/>
+              </a:rPr>
+              <a:t>100</a:t>
+            </a:r>
+          </a:p>
+        </p:txBody>
+      </p:sp>
+      <p:cxnSp>
+        <p:nvCxnSpPr>
+          <p:cNvPr id="25" name="A-E16 line 23" descr="sci-ppt:o023"/>
+          <p:cNvCxnSpPr/>
+          <p:nvPr/>
+        </p:nvCxnSpPr>
+        <p:spPr>
+          <a:xfrm>
+            <a:off x="7680960" y="4480560"/>
+            <a:ext cx="0" cy="64008"/>
+          </a:xfrm>
+          <a:prstGeom prst="line">
+            <a:avLst/>
+          </a:prstGeom>
+          <a:ln w="12700">
+            <a:solidFill>
+              <a:srgbClr val="B4C7D2"/>
+            </a:solidFill>
+          </a:ln>
+          <a:effectLst/>
+        </p:spPr>
+      </p:cxnSp>
+      <p:cxnSp>
+        <p:nvCxnSpPr>
+          <p:cNvPr id="26" name="A-E16 line 24" descr="sci-ppt:o024"/>
+          <p:cNvCxnSpPr/>
+          <p:nvPr/>
+        </p:nvCxnSpPr>
+        <p:spPr>
+          <a:xfrm>
+            <a:off x="7680960" y="2103120"/>
+            <a:ext cx="0" cy="2377440"/>
+          </a:xfrm>
+          <a:prstGeom prst="line">
+            <a:avLst/>
+          </a:prstGeom>
+          <a:ln w="7620">
+            <a:solidFill>
+              <a:srgbClr val="2E4756"/>
+            </a:solidFill>
+          </a:ln>
+          <a:effectLst/>
+        </p:spPr>
+      </p:cxnSp>
+      <p:sp>
+        <p:nvSpPr>
+          <p:cNvPr id="27" name="A-E16 text 25" descr="sci-ppt:o025"/>
+          <p:cNvSpPr txBox="1"/>
+          <p:nvPr/>
+        </p:nvSpPr>
+        <p:spPr>
+          <a:xfrm>
+            <a:off x="7223760" y="4562856"/>
+            <a:ext cx="914400" cy="208407"/>
+          </a:xfrm>
+          <a:prstGeom prst="rect">
+            <a:avLst/>
+          </a:prstGeom>
+          <a:noFill/>
+          <a:effectLst/>
+        </p:spPr>
+        <p:txBody>
+          <a:bodyPr wrap="none" lIns="18288" rIns="18288" tIns="18288" bIns="18288" anchor="t">
+            <a:spAutoFit/>
+          </a:bodyPr>
+          <a:lstStyle/>
+          <a:p>
+            <a:pPr algn="ctr">
+              <a:spcAft>
+                <a:spcPts val="0"/>
+              </a:spcAft>
+            </a:pPr>
+            <a:r>
+              <a:rPr sz="1050" b="0" i="0">
+                <a:solidFill>
+                  <a:srgbClr val="B4C7D2"/>
+                </a:solidFill>
+                <a:latin typeface="Arial"/>
+              </a:rPr>
+              <a:t>1000</a:t>
+            </a:r>
+          </a:p>
+        </p:txBody>
+      </p:sp>
+      <p:cxnSp>
+        <p:nvCxnSpPr>
+          <p:cNvPr id="28" name="A-E16 line 26" descr="sci-ppt:o026"/>
+          <p:cNvCxnSpPr/>
+          <p:nvPr/>
+        </p:nvCxnSpPr>
+        <p:spPr>
+          <a:xfrm>
+            <a:off x="850392" y="4480560"/>
+            <a:ext cx="64008" cy="0"/>
+          </a:xfrm>
+          <a:prstGeom prst="line">
+            <a:avLst/>
+          </a:prstGeom>
+          <a:ln w="12700">
+            <a:solidFill>
+              <a:srgbClr val="B4C7D2"/>
+            </a:solidFill>
+          </a:ln>
+          <a:effectLst/>
+        </p:spPr>
+      </p:cxnSp>
+      <p:cxnSp>
+        <p:nvCxnSpPr>
+          <p:cNvPr id="29" name="A-E16 line 27" descr="sci-ppt:o027"/>
+          <p:cNvCxnSpPr/>
+          <p:nvPr/>
+        </p:nvCxnSpPr>
+        <p:spPr>
+          <a:xfrm>
+            <a:off x="850392" y="3348445"/>
+            <a:ext cx="64008" cy="0"/>
+          </a:xfrm>
+          <a:prstGeom prst="line">
+            <a:avLst/>
+          </a:prstGeom>
+          <a:ln w="12700">
+            <a:solidFill>
+              <a:srgbClr val="B4C7D2"/>
+            </a:solidFill>
+          </a:ln>
+          <a:effectLst/>
+        </p:spPr>
+      </p:cxnSp>
+      <p:cxnSp>
+        <p:nvCxnSpPr>
+          <p:cNvPr id="30" name="A-E16 line 28" descr="sci-ppt:o028"/>
+          <p:cNvCxnSpPr/>
+          <p:nvPr/>
+        </p:nvCxnSpPr>
+        <p:spPr>
+          <a:xfrm>
+            <a:off x="914400" y="3348445"/>
+            <a:ext cx="6766560" cy="0"/>
+          </a:xfrm>
+          <a:prstGeom prst="line">
+            <a:avLst/>
+          </a:prstGeom>
+          <a:ln w="7620">
+            <a:solidFill>
+              <a:srgbClr val="2E4756"/>
+            </a:solidFill>
+          </a:ln>
+          <a:effectLst/>
+        </p:spPr>
+      </p:cxnSp>
+      <p:sp>
+        <p:nvSpPr>
+          <p:cNvPr id="31" name="A-E16 text 29" descr="sci-ppt:o029"/>
+          <p:cNvSpPr txBox="1"/>
+          <p:nvPr/>
+        </p:nvSpPr>
+        <p:spPr>
+          <a:xfrm>
+            <a:off x="45720" y="3266149"/>
+            <a:ext cx="777240" cy="208407"/>
+          </a:xfrm>
+          <a:prstGeom prst="rect">
+            <a:avLst/>
+          </a:prstGeom>
+          <a:noFill/>
+          <a:effectLst/>
+        </p:spPr>
+        <p:txBody>
+          <a:bodyPr wrap="none" lIns="18288" rIns="18288" tIns="18288" bIns="18288" anchor="t">
+            <a:spAutoFit/>
+          </a:bodyPr>
+          <a:lstStyle/>
+          <a:p>
+            <a:pPr algn="r">
+              <a:spcAft>
+                <a:spcPts val="0"/>
+              </a:spcAft>
+            </a:pPr>
+            <a:r>
+              <a:rPr sz="1050" b="0" i="0">
+                <a:solidFill>
+                  <a:srgbClr val="B4C7D2"/>
+                </a:solidFill>
+                <a:latin typeface="Arial"/>
+              </a:rPr>
+              <a:t>0.5</a:t>
+            </a:r>
+          </a:p>
+        </p:txBody>
+      </p:sp>
+      <p:cxnSp>
+        <p:nvCxnSpPr>
+          <p:cNvPr id="32" name="A-E16 line 30" descr="sci-ppt:o030"/>
+          <p:cNvCxnSpPr/>
+          <p:nvPr/>
+        </p:nvCxnSpPr>
+        <p:spPr>
+          <a:xfrm>
+            <a:off x="850392" y="2216331"/>
+            <a:ext cx="64008" cy="0"/>
+          </a:xfrm>
+          <a:prstGeom prst="line">
+            <a:avLst/>
+          </a:prstGeom>
+          <a:ln w="12700">
+            <a:solidFill>
+              <a:srgbClr val="B4C7D2"/>
+            </a:solidFill>
+          </a:ln>
+          <a:effectLst/>
+        </p:spPr>
+      </p:cxnSp>
+      <p:cxnSp>
+        <p:nvCxnSpPr>
+          <p:cNvPr id="33" name="A-E16 line 31" descr="sci-ppt:o031"/>
+          <p:cNvCxnSpPr/>
+          <p:nvPr/>
+        </p:nvCxnSpPr>
+        <p:spPr>
+          <a:xfrm>
+            <a:off x="914400" y="2216331"/>
+            <a:ext cx="6766560" cy="0"/>
+          </a:xfrm>
+          <a:prstGeom prst="line">
+            <a:avLst/>
+          </a:prstGeom>
+          <a:ln w="7620">
+            <a:solidFill>
+              <a:srgbClr val="2E4756"/>
+            </a:solidFill>
+          </a:ln>
+          <a:effectLst/>
+        </p:spPr>
+      </p:cxnSp>
+      <p:sp>
+        <p:nvSpPr>
+          <p:cNvPr id="34" name="A-E16 text 32" descr="sci-ppt:o032"/>
+          <p:cNvSpPr txBox="1"/>
+          <p:nvPr/>
+        </p:nvSpPr>
+        <p:spPr>
+          <a:xfrm>
+            <a:off x="45720" y="2134035"/>
+            <a:ext cx="777240" cy="208407"/>
+          </a:xfrm>
+          <a:prstGeom prst="rect">
+            <a:avLst/>
+          </a:prstGeom>
+          <a:noFill/>
+          <a:effectLst/>
+        </p:spPr>
+        <p:txBody>
+          <a:bodyPr wrap="none" lIns="18288" rIns="18288" tIns="18288" bIns="18288" anchor="t">
+            <a:spAutoFit/>
+          </a:bodyPr>
+          <a:lstStyle/>
+          <a:p>
+            <a:pPr algn="r">
+              <a:spcAft>
+                <a:spcPts val="0"/>
+              </a:spcAft>
+            </a:pPr>
+            <a:r>
+              <a:rPr sz="1050" b="0" i="0">
+                <a:solidFill>
+                  <a:srgbClr val="B4C7D2"/>
+                </a:solidFill>
+                <a:latin typeface="Arial"/>
+              </a:rPr>
+              <a:t>1.0</a:t>
+            </a:r>
+          </a:p>
+        </p:txBody>
+      </p:sp>
+      <p:sp>
+        <p:nvSpPr>
+          <p:cNvPr id="35" name="A-E16 text 33" descr="sci-ppt:o033"/>
+          <p:cNvSpPr txBox="1"/>
+          <p:nvPr/>
+        </p:nvSpPr>
+        <p:spPr>
+          <a:xfrm>
+            <a:off x="914400" y="4764024"/>
+            <a:ext cx="6766560" cy="231648"/>
+          </a:xfrm>
+          <a:prstGeom prst="rect">
+            <a:avLst/>
+          </a:prstGeom>
+          <a:noFill/>
+          <a:effectLst/>
+        </p:spPr>
+        <p:txBody>
+          <a:bodyPr wrap="none" lIns="18288" rIns="18288" tIns="18288" bIns="18288" anchor="t">
+            <a:spAutoFit/>
+          </a:bodyPr>
+          <a:lstStyle/>
+          <a:p>
+            <a:pPr algn="ctr">
+              <a:spcAft>
+                <a:spcPts val="0"/>
+              </a:spcAft>
+            </a:pPr>
+            <a:r>
+              <a:rPr sz="1200" b="0" i="0">
+                <a:solidFill>
+                  <a:srgbClr val="E7F0F3"/>
+                </a:solidFill>
+                <a:latin typeface="Arial"/>
+              </a:rPr>
+              <a:t>De  (log scale)</a:t>
+            </a:r>
+          </a:p>
+        </p:txBody>
+      </p:sp>
+      <p:sp>
+        <p:nvSpPr>
+          <p:cNvPr id="36" name="A-E16 text 34" descr="sci-ppt:o034"/>
+          <p:cNvSpPr txBox="1"/>
+          <p:nvPr/>
+        </p:nvSpPr>
+        <p:spPr>
+          <a:xfrm>
+            <a:off x="365760" y="1755648"/>
+            <a:ext cx="6766560" cy="231648"/>
+          </a:xfrm>
+          <a:prstGeom prst="rect">
+            <a:avLst/>
+          </a:prstGeom>
+          <a:noFill/>
+          <a:effectLst/>
+        </p:spPr>
+        <p:txBody>
+          <a:bodyPr wrap="none" lIns="18288" rIns="18288" tIns="18288" bIns="18288" anchor="t">
+            <a:spAutoFit/>
+          </a:bodyPr>
+          <a:lstStyle/>
+          <a:p>
+            <a:pPr algn="l">
+              <a:spcAft>
+                <a:spcPts val="0"/>
+              </a:spcAft>
+            </a:pPr>
+            <a:r>
+              <a:rPr sz="1200" b="0" i="0">
+                <a:solidFill>
+                  <a:srgbClr val="E7F0F3"/>
+                </a:solidFill>
+                <a:latin typeface="Arial"/>
+              </a:rPr>
+              <a:t>elastic share (conventional)</a:t>
+            </a:r>
+          </a:p>
+        </p:txBody>
+      </p:sp>
+      <p:sp>
+        <p:nvSpPr>
+          <p:cNvPr id="37" name="A-E16 polygon 35" descr="sci-ppt:o035"/>
           <p:cNvSpPr/>
           <p:nvPr/>
         </p:nvSpPr>
         <p:spPr>
           <a:xfrm>
-            <a:off x="996696" y="1069848"/>
-            <a:ext cx="6766560" cy="347472"/>
+            <a:off x="914400" y="2216331"/>
+            <a:ext cx="2187170" cy="2264229"/>
+          </a:xfrm>
+          <a:custGeom>
+            <a:avLst/>
+            <a:gdLst/>
+            <a:ahLst/>
+            <a:cxnLst/>
+            <a:rect l="l" t="t" r="r" b="b"/>
+            <a:pathLst>
+              <a:path w="2187170" h="2264229">
+                <a:moveTo>
+                  <a:pt x="0" y="0"/>
+                </a:moveTo>
+                <a:lnTo>
+                  <a:pt x="68349" y="0"/>
+                </a:lnTo>
+                <a:lnTo>
+                  <a:pt x="136698" y="0"/>
+                </a:lnTo>
+                <a:lnTo>
+                  <a:pt x="205047" y="0"/>
+                </a:lnTo>
+                <a:lnTo>
+                  <a:pt x="273396" y="0"/>
+                </a:lnTo>
+                <a:lnTo>
+                  <a:pt x="341745" y="0"/>
+                </a:lnTo>
+                <a:lnTo>
+                  <a:pt x="410094" y="0"/>
+                </a:lnTo>
+                <a:lnTo>
+                  <a:pt x="478443" y="0"/>
+                </a:lnTo>
+                <a:lnTo>
+                  <a:pt x="546792" y="0"/>
+                </a:lnTo>
+                <a:lnTo>
+                  <a:pt x="615141" y="0"/>
+                </a:lnTo>
+                <a:lnTo>
+                  <a:pt x="683490" y="0"/>
+                </a:lnTo>
+                <a:lnTo>
+                  <a:pt x="751840" y="0"/>
+                </a:lnTo>
+                <a:lnTo>
+                  <a:pt x="820189" y="0"/>
+                </a:lnTo>
+                <a:lnTo>
+                  <a:pt x="888538" y="0"/>
+                </a:lnTo>
+                <a:lnTo>
+                  <a:pt x="956887" y="0"/>
+                </a:lnTo>
+                <a:lnTo>
+                  <a:pt x="1025236" y="0"/>
+                </a:lnTo>
+                <a:lnTo>
+                  <a:pt x="1093585" y="0"/>
+                </a:lnTo>
+                <a:lnTo>
+                  <a:pt x="1161934" y="0"/>
+                </a:lnTo>
+                <a:lnTo>
+                  <a:pt x="1230283" y="0"/>
+                </a:lnTo>
+                <a:lnTo>
+                  <a:pt x="1298632" y="0"/>
+                </a:lnTo>
+                <a:lnTo>
+                  <a:pt x="1366981" y="0"/>
+                </a:lnTo>
+                <a:lnTo>
+                  <a:pt x="1435330" y="0"/>
+                </a:lnTo>
+                <a:lnTo>
+                  <a:pt x="1503680" y="0"/>
+                </a:lnTo>
+                <a:lnTo>
+                  <a:pt x="1572029" y="0"/>
+                </a:lnTo>
+                <a:lnTo>
+                  <a:pt x="1640378" y="0"/>
+                </a:lnTo>
+                <a:lnTo>
+                  <a:pt x="1708727" y="0"/>
+                </a:lnTo>
+                <a:lnTo>
+                  <a:pt x="1777076" y="0"/>
+                </a:lnTo>
+                <a:lnTo>
+                  <a:pt x="1845425" y="0"/>
+                </a:lnTo>
+                <a:lnTo>
+                  <a:pt x="1913774" y="0"/>
+                </a:lnTo>
+                <a:lnTo>
+                  <a:pt x="1982123" y="0"/>
+                </a:lnTo>
+                <a:lnTo>
+                  <a:pt x="2050472" y="0"/>
+                </a:lnTo>
+                <a:lnTo>
+                  <a:pt x="2118821" y="0"/>
+                </a:lnTo>
+                <a:lnTo>
+                  <a:pt x="2187170" y="0"/>
+                </a:lnTo>
+                <a:lnTo>
+                  <a:pt x="2187170" y="2264229"/>
+                </a:lnTo>
+                <a:lnTo>
+                  <a:pt x="2118821" y="2264229"/>
+                </a:lnTo>
+                <a:lnTo>
+                  <a:pt x="2050472" y="2264229"/>
+                </a:lnTo>
+                <a:lnTo>
+                  <a:pt x="1982123" y="2264229"/>
+                </a:lnTo>
+                <a:lnTo>
+                  <a:pt x="1913774" y="2264229"/>
+                </a:lnTo>
+                <a:lnTo>
+                  <a:pt x="1845425" y="2264229"/>
+                </a:lnTo>
+                <a:lnTo>
+                  <a:pt x="1777076" y="2264229"/>
+                </a:lnTo>
+                <a:lnTo>
+                  <a:pt x="1708727" y="2264229"/>
+                </a:lnTo>
+                <a:lnTo>
+                  <a:pt x="1640378" y="2264229"/>
+                </a:lnTo>
+                <a:lnTo>
+                  <a:pt x="1572029" y="2264229"/>
+                </a:lnTo>
+                <a:lnTo>
+                  <a:pt x="1503680" y="2264229"/>
+                </a:lnTo>
+                <a:lnTo>
+                  <a:pt x="1435330" y="2264229"/>
+                </a:lnTo>
+                <a:lnTo>
+                  <a:pt x="1366981" y="2264229"/>
+                </a:lnTo>
+                <a:lnTo>
+                  <a:pt x="1298632" y="2264229"/>
+                </a:lnTo>
+                <a:lnTo>
+                  <a:pt x="1230283" y="2264229"/>
+                </a:lnTo>
+                <a:lnTo>
+                  <a:pt x="1161934" y="2264229"/>
+                </a:lnTo>
+                <a:lnTo>
+                  <a:pt x="1093585" y="2264229"/>
+                </a:lnTo>
+                <a:lnTo>
+                  <a:pt x="1025236" y="2264229"/>
+                </a:lnTo>
+                <a:lnTo>
+                  <a:pt x="956887" y="2264229"/>
+                </a:lnTo>
+                <a:lnTo>
+                  <a:pt x="888538" y="2264229"/>
+                </a:lnTo>
+                <a:lnTo>
+                  <a:pt x="820189" y="2264229"/>
+                </a:lnTo>
+                <a:lnTo>
+                  <a:pt x="751840" y="2264229"/>
+                </a:lnTo>
+                <a:lnTo>
+                  <a:pt x="683490" y="2264229"/>
+                </a:lnTo>
+                <a:lnTo>
+                  <a:pt x="615141" y="2264229"/>
+                </a:lnTo>
+                <a:lnTo>
+                  <a:pt x="546792" y="2264229"/>
+                </a:lnTo>
+                <a:lnTo>
+                  <a:pt x="478443" y="2264229"/>
+                </a:lnTo>
+                <a:lnTo>
+                  <a:pt x="410094" y="2264229"/>
+                </a:lnTo>
+                <a:lnTo>
+                  <a:pt x="341745" y="2264229"/>
+                </a:lnTo>
+                <a:lnTo>
+                  <a:pt x="273396" y="2264229"/>
+                </a:lnTo>
+                <a:lnTo>
+                  <a:pt x="205047" y="2264229"/>
+                </a:lnTo>
+                <a:lnTo>
+                  <a:pt x="136698" y="2264229"/>
+                </a:lnTo>
+                <a:lnTo>
+                  <a:pt x="68349" y="2264229"/>
+                </a:lnTo>
+                <a:lnTo>
+                  <a:pt x="0" y="2264229"/>
+                </a:lnTo>
+                <a:close/>
+              </a:path>
+            </a:pathLst>
+          </a:custGeom>
+          <a:solidFill>
+            <a:srgbClr val="7FC8F8">
+              <a:alpha val="15000"/>
+            </a:srgbClr>
+          </a:solidFill>
+          <a:ln w="10160">
+            <a:solidFill>
+              <a:srgbClr val="7FC8F8">
+                <a:alpha val="15000"/>
+              </a:srgbClr>
+            </a:solidFill>
+          </a:ln>
+          <a:effectLst/>
+        </p:spPr>
+        <p:txBody>
+          <a:bodyPr rtlCol="0" anchor="ctr"/>
+          <a:lstStyle/>
+          <a:p>
+            <a:pPr algn="ctr"/>
+          </a:p>
+        </p:txBody>
+      </p:sp>
+      <p:sp>
+        <p:nvSpPr>
+          <p:cNvPr id="38" name="A-E16 polygon 36" descr="sci-ppt:o036"/>
+          <p:cNvSpPr/>
+          <p:nvPr/>
+        </p:nvSpPr>
+        <p:spPr>
+          <a:xfrm>
+            <a:off x="5493789" y="2216331"/>
+            <a:ext cx="2187171" cy="2264229"/>
+          </a:xfrm>
+          <a:custGeom>
+            <a:avLst/>
+            <a:gdLst/>
+            <a:ahLst/>
+            <a:cxnLst/>
+            <a:rect l="l" t="t" r="r" b="b"/>
+            <a:pathLst>
+              <a:path w="2187171" h="2264229">
+                <a:moveTo>
+                  <a:pt x="0" y="0"/>
+                </a:moveTo>
+                <a:lnTo>
+                  <a:pt x="68349" y="0"/>
+                </a:lnTo>
+                <a:lnTo>
+                  <a:pt x="136698" y="0"/>
+                </a:lnTo>
+                <a:lnTo>
+                  <a:pt x="205047" y="0"/>
+                </a:lnTo>
+                <a:lnTo>
+                  <a:pt x="273396" y="0"/>
+                </a:lnTo>
+                <a:lnTo>
+                  <a:pt x="341745" y="0"/>
+                </a:lnTo>
+                <a:lnTo>
+                  <a:pt x="410094" y="0"/>
+                </a:lnTo>
+                <a:lnTo>
+                  <a:pt x="478443" y="0"/>
+                </a:lnTo>
+                <a:lnTo>
+                  <a:pt x="546792" y="0"/>
+                </a:lnTo>
+                <a:lnTo>
+                  <a:pt x="615141" y="0"/>
+                </a:lnTo>
+                <a:lnTo>
+                  <a:pt x="683491" y="0"/>
+                </a:lnTo>
+                <a:lnTo>
+                  <a:pt x="751840" y="0"/>
+                </a:lnTo>
+                <a:lnTo>
+                  <a:pt x="820189" y="0"/>
+                </a:lnTo>
+                <a:lnTo>
+                  <a:pt x="888538" y="0"/>
+                </a:lnTo>
+                <a:lnTo>
+                  <a:pt x="956887" y="0"/>
+                </a:lnTo>
+                <a:lnTo>
+                  <a:pt x="1025236" y="0"/>
+                </a:lnTo>
+                <a:lnTo>
+                  <a:pt x="1093585" y="0"/>
+                </a:lnTo>
+                <a:lnTo>
+                  <a:pt x="1161934" y="0"/>
+                </a:lnTo>
+                <a:lnTo>
+                  <a:pt x="1230283" y="0"/>
+                </a:lnTo>
+                <a:lnTo>
+                  <a:pt x="1298632" y="0"/>
+                </a:lnTo>
+                <a:lnTo>
+                  <a:pt x="1366981" y="0"/>
+                </a:lnTo>
+                <a:lnTo>
+                  <a:pt x="1435331" y="0"/>
+                </a:lnTo>
+                <a:lnTo>
+                  <a:pt x="1503680" y="0"/>
+                </a:lnTo>
+                <a:lnTo>
+                  <a:pt x="1572029" y="0"/>
+                </a:lnTo>
+                <a:lnTo>
+                  <a:pt x="1640378" y="0"/>
+                </a:lnTo>
+                <a:lnTo>
+                  <a:pt x="1708727" y="0"/>
+                </a:lnTo>
+                <a:lnTo>
+                  <a:pt x="1777076" y="0"/>
+                </a:lnTo>
+                <a:lnTo>
+                  <a:pt x="1845425" y="0"/>
+                </a:lnTo>
+                <a:lnTo>
+                  <a:pt x="1913774" y="0"/>
+                </a:lnTo>
+                <a:lnTo>
+                  <a:pt x="1982123" y="0"/>
+                </a:lnTo>
+                <a:lnTo>
+                  <a:pt x="2050472" y="0"/>
+                </a:lnTo>
+                <a:lnTo>
+                  <a:pt x="2118821" y="0"/>
+                </a:lnTo>
+                <a:lnTo>
+                  <a:pt x="2187171" y="0"/>
+                </a:lnTo>
+                <a:lnTo>
+                  <a:pt x="2187171" y="2264229"/>
+                </a:lnTo>
+                <a:lnTo>
+                  <a:pt x="2118821" y="2264229"/>
+                </a:lnTo>
+                <a:lnTo>
+                  <a:pt x="2050472" y="2264229"/>
+                </a:lnTo>
+                <a:lnTo>
+                  <a:pt x="1982123" y="2264229"/>
+                </a:lnTo>
+                <a:lnTo>
+                  <a:pt x="1913774" y="2264229"/>
+                </a:lnTo>
+                <a:lnTo>
+                  <a:pt x="1845425" y="2264229"/>
+                </a:lnTo>
+                <a:lnTo>
+                  <a:pt x="1777076" y="2264229"/>
+                </a:lnTo>
+                <a:lnTo>
+                  <a:pt x="1708727" y="2264229"/>
+                </a:lnTo>
+                <a:lnTo>
+                  <a:pt x="1640378" y="2264229"/>
+                </a:lnTo>
+                <a:lnTo>
+                  <a:pt x="1572029" y="2264229"/>
+                </a:lnTo>
+                <a:lnTo>
+                  <a:pt x="1503680" y="2264229"/>
+                </a:lnTo>
+                <a:lnTo>
+                  <a:pt x="1435331" y="2264229"/>
+                </a:lnTo>
+                <a:lnTo>
+                  <a:pt x="1366981" y="2264229"/>
+                </a:lnTo>
+                <a:lnTo>
+                  <a:pt x="1298632" y="2264229"/>
+                </a:lnTo>
+                <a:lnTo>
+                  <a:pt x="1230283" y="2264229"/>
+                </a:lnTo>
+                <a:lnTo>
+                  <a:pt x="1161934" y="2264229"/>
+                </a:lnTo>
+                <a:lnTo>
+                  <a:pt x="1093585" y="2264229"/>
+                </a:lnTo>
+                <a:lnTo>
+                  <a:pt x="1025236" y="2264229"/>
+                </a:lnTo>
+                <a:lnTo>
+                  <a:pt x="956887" y="2264229"/>
+                </a:lnTo>
+                <a:lnTo>
+                  <a:pt x="888538" y="2264229"/>
+                </a:lnTo>
+                <a:lnTo>
+                  <a:pt x="820189" y="2264229"/>
+                </a:lnTo>
+                <a:lnTo>
+                  <a:pt x="751840" y="2264229"/>
+                </a:lnTo>
+                <a:lnTo>
+                  <a:pt x="683491" y="2264229"/>
+                </a:lnTo>
+                <a:lnTo>
+                  <a:pt x="615141" y="2264229"/>
+                </a:lnTo>
+                <a:lnTo>
+                  <a:pt x="546792" y="2264229"/>
+                </a:lnTo>
+                <a:lnTo>
+                  <a:pt x="478443" y="2264229"/>
+                </a:lnTo>
+                <a:lnTo>
+                  <a:pt x="410094" y="2264229"/>
+                </a:lnTo>
+                <a:lnTo>
+                  <a:pt x="341745" y="2264229"/>
+                </a:lnTo>
+                <a:lnTo>
+                  <a:pt x="273396" y="2264229"/>
+                </a:lnTo>
+                <a:lnTo>
+                  <a:pt x="205047" y="2264229"/>
+                </a:lnTo>
+                <a:lnTo>
+                  <a:pt x="136698" y="2264229"/>
+                </a:lnTo>
+                <a:lnTo>
+                  <a:pt x="68349" y="2264229"/>
+                </a:lnTo>
+                <a:lnTo>
+                  <a:pt x="0" y="2264229"/>
+                </a:lnTo>
+                <a:close/>
+              </a:path>
+            </a:pathLst>
+          </a:custGeom>
+          <a:solidFill>
+            <a:srgbClr val="F2B880">
+              <a:alpha val="15000"/>
+            </a:srgbClr>
+          </a:solidFill>
+          <a:ln w="10160">
+            <a:solidFill>
+              <a:srgbClr val="F2B880">
+                <a:alpha val="15000"/>
+              </a:srgbClr>
+            </a:solidFill>
+          </a:ln>
+          <a:effectLst/>
+        </p:spPr>
+        <p:txBody>
+          <a:bodyPr rtlCol="0" anchor="ctr"/>
+          <a:lstStyle/>
+          <a:p>
+            <a:pPr algn="ctr"/>
+          </a:p>
+        </p:txBody>
+      </p:sp>
+      <p:sp>
+        <p:nvSpPr>
+          <p:cNvPr id="39" name="A-E16 polygon 37" descr="sci-ppt:o037"/>
+          <p:cNvSpPr/>
+          <p:nvPr/>
+        </p:nvSpPr>
+        <p:spPr>
+          <a:xfrm>
+            <a:off x="914400" y="2218593"/>
+            <a:ext cx="6766560" cy="2259705"/>
+          </a:xfrm>
+          <a:custGeom>
+            <a:avLst/>
+            <a:gdLst/>
+            <a:ahLst/>
+            <a:cxnLst/>
+            <a:rect l="l" t="t" r="r" b="b"/>
+            <a:pathLst>
+              <a:path w="6766560" h="2259705">
+                <a:moveTo>
+                  <a:pt x="0" y="2259705"/>
+                </a:moveTo>
+                <a:lnTo>
+                  <a:pt x="68349" y="2259366"/>
+                </a:lnTo>
+                <a:lnTo>
+                  <a:pt x="136698" y="2258977"/>
+                </a:lnTo>
+                <a:lnTo>
+                  <a:pt x="205047" y="2258530"/>
+                </a:lnTo>
+                <a:lnTo>
+                  <a:pt x="273396" y="2258017"/>
+                </a:lnTo>
+                <a:lnTo>
+                  <a:pt x="341745" y="2257426"/>
+                </a:lnTo>
+                <a:lnTo>
+                  <a:pt x="410094" y="2256748"/>
+                </a:lnTo>
+                <a:lnTo>
+                  <a:pt x="478443" y="2255968"/>
+                </a:lnTo>
+                <a:lnTo>
+                  <a:pt x="546792" y="2255073"/>
+                </a:lnTo>
+                <a:lnTo>
+                  <a:pt x="615141" y="2254044"/>
+                </a:lnTo>
+                <a:lnTo>
+                  <a:pt x="683490" y="2252863"/>
+                </a:lnTo>
+                <a:lnTo>
+                  <a:pt x="751840" y="2251505"/>
+                </a:lnTo>
+                <a:lnTo>
+                  <a:pt x="820189" y="2249947"/>
+                </a:lnTo>
+                <a:lnTo>
+                  <a:pt x="888538" y="2248158"/>
+                </a:lnTo>
+                <a:lnTo>
+                  <a:pt x="956887" y="2246105"/>
+                </a:lnTo>
+                <a:lnTo>
+                  <a:pt x="1025236" y="2243748"/>
+                </a:lnTo>
+                <a:lnTo>
+                  <a:pt x="1093585" y="2241045"/>
+                </a:lnTo>
+                <a:lnTo>
+                  <a:pt x="1161934" y="2237945"/>
+                </a:lnTo>
+                <a:lnTo>
+                  <a:pt x="1230283" y="2234392"/>
+                </a:lnTo>
+                <a:lnTo>
+                  <a:pt x="1298632" y="2230320"/>
+                </a:lnTo>
+                <a:lnTo>
+                  <a:pt x="1366981" y="2225657"/>
+                </a:lnTo>
+                <a:lnTo>
+                  <a:pt x="1435330" y="2220319"/>
+                </a:lnTo>
+                <a:lnTo>
+                  <a:pt x="1503680" y="2214214"/>
+                </a:lnTo>
+                <a:lnTo>
+                  <a:pt x="1572029" y="2207236"/>
+                </a:lnTo>
+                <a:lnTo>
+                  <a:pt x="1640378" y="2199266"/>
+                </a:lnTo>
+                <a:lnTo>
+                  <a:pt x="1708727" y="2190174"/>
+                </a:lnTo>
+                <a:lnTo>
+                  <a:pt x="1777076" y="2179813"/>
+                </a:lnTo>
+                <a:lnTo>
+                  <a:pt x="1845425" y="2168020"/>
+                </a:lnTo>
+                <a:lnTo>
+                  <a:pt x="1913774" y="2154618"/>
+                </a:lnTo>
+                <a:lnTo>
+                  <a:pt x="1982123" y="2139412"/>
+                </a:lnTo>
+                <a:lnTo>
+                  <a:pt x="2050472" y="2122192"/>
+                </a:lnTo>
+                <a:lnTo>
+                  <a:pt x="2118821" y="2102731"/>
+                </a:lnTo>
+                <a:lnTo>
+                  <a:pt x="2187170" y="2080793"/>
+                </a:lnTo>
+                <a:lnTo>
+                  <a:pt x="2255520" y="2056128"/>
+                </a:lnTo>
+                <a:lnTo>
+                  <a:pt x="2323869" y="2028480"/>
+                </a:lnTo>
+                <a:lnTo>
+                  <a:pt x="2392218" y="1997597"/>
+                </a:lnTo>
+                <a:lnTo>
+                  <a:pt x="2460567" y="1963229"/>
+                </a:lnTo>
+                <a:lnTo>
+                  <a:pt x="2528916" y="1925146"/>
+                </a:lnTo>
+                <a:lnTo>
+                  <a:pt x="2597265" y="1883144"/>
+                </a:lnTo>
+                <a:lnTo>
+                  <a:pt x="2665614" y="1837059"/>
+                </a:lnTo>
+                <a:lnTo>
+                  <a:pt x="2733963" y="1786781"/>
+                </a:lnTo>
+                <a:lnTo>
+                  <a:pt x="2802312" y="1732267"/>
+                </a:lnTo>
+                <a:lnTo>
+                  <a:pt x="2870661" y="1673555"/>
+                </a:lnTo>
+                <a:lnTo>
+                  <a:pt x="2939010" y="1610779"/>
+                </a:lnTo>
+                <a:lnTo>
+                  <a:pt x="3007360" y="1544174"/>
+                </a:lnTo>
+                <a:lnTo>
+                  <a:pt x="3075709" y="1474085"/>
+                </a:lnTo>
+                <a:lnTo>
+                  <a:pt x="3144058" y="1400962"/>
+                </a:lnTo>
+                <a:lnTo>
+                  <a:pt x="3212407" y="1325357"/>
+                </a:lnTo>
+                <a:lnTo>
+                  <a:pt x="3280756" y="1247912"/>
+                </a:lnTo>
+                <a:lnTo>
+                  <a:pt x="3349105" y="1169333"/>
+                </a:lnTo>
+                <a:lnTo>
+                  <a:pt x="3417454" y="1090371"/>
+                </a:lnTo>
+                <a:lnTo>
+                  <a:pt x="3485803" y="1011793"/>
+                </a:lnTo>
+                <a:lnTo>
+                  <a:pt x="3554152" y="934347"/>
+                </a:lnTo>
+                <a:lnTo>
+                  <a:pt x="3622501" y="858743"/>
+                </a:lnTo>
+                <a:lnTo>
+                  <a:pt x="3690850" y="785620"/>
+                </a:lnTo>
+                <a:lnTo>
+                  <a:pt x="3759200" y="715530"/>
+                </a:lnTo>
+                <a:lnTo>
+                  <a:pt x="3827549" y="648925"/>
+                </a:lnTo>
+                <a:lnTo>
+                  <a:pt x="3895898" y="586149"/>
+                </a:lnTo>
+                <a:lnTo>
+                  <a:pt x="3964247" y="527438"/>
+                </a:lnTo>
+                <a:lnTo>
+                  <a:pt x="4032596" y="472923"/>
+                </a:lnTo>
+                <a:lnTo>
+                  <a:pt x="4100945" y="422645"/>
+                </a:lnTo>
+                <a:lnTo>
+                  <a:pt x="4169294" y="376560"/>
+                </a:lnTo>
+                <a:lnTo>
+                  <a:pt x="4237643" y="334558"/>
+                </a:lnTo>
+                <a:lnTo>
+                  <a:pt x="4305992" y="296475"/>
+                </a:lnTo>
+                <a:lnTo>
+                  <a:pt x="4374341" y="262108"/>
+                </a:lnTo>
+                <a:lnTo>
+                  <a:pt x="4442690" y="231224"/>
+                </a:lnTo>
+                <a:lnTo>
+                  <a:pt x="4511040" y="203577"/>
+                </a:lnTo>
+                <a:lnTo>
+                  <a:pt x="4579389" y="178911"/>
+                </a:lnTo>
+                <a:lnTo>
+                  <a:pt x="4647738" y="156973"/>
+                </a:lnTo>
+                <a:lnTo>
+                  <a:pt x="4716087" y="137513"/>
+                </a:lnTo>
+                <a:lnTo>
+                  <a:pt x="4784436" y="120292"/>
+                </a:lnTo>
+                <a:lnTo>
+                  <a:pt x="4852785" y="105086"/>
+                </a:lnTo>
+                <a:lnTo>
+                  <a:pt x="4921134" y="91684"/>
+                </a:lnTo>
+                <a:lnTo>
+                  <a:pt x="4989483" y="79892"/>
+                </a:lnTo>
+                <a:lnTo>
+                  <a:pt x="5057832" y="69530"/>
+                </a:lnTo>
+                <a:lnTo>
+                  <a:pt x="5126181" y="60438"/>
+                </a:lnTo>
+                <a:lnTo>
+                  <a:pt x="5194530" y="52469"/>
+                </a:lnTo>
+                <a:lnTo>
+                  <a:pt x="5262880" y="45490"/>
+                </a:lnTo>
+                <a:lnTo>
+                  <a:pt x="5331229" y="39385"/>
+                </a:lnTo>
+                <a:lnTo>
+                  <a:pt x="5399578" y="34047"/>
+                </a:lnTo>
+                <a:lnTo>
+                  <a:pt x="5467927" y="29384"/>
+                </a:lnTo>
+                <a:lnTo>
+                  <a:pt x="5536276" y="25312"/>
+                </a:lnTo>
+                <a:lnTo>
+                  <a:pt x="5604625" y="21759"/>
+                </a:lnTo>
+                <a:lnTo>
+                  <a:pt x="5672974" y="18659"/>
+                </a:lnTo>
+                <a:lnTo>
+                  <a:pt x="5741323" y="15956"/>
+                </a:lnTo>
+                <a:lnTo>
+                  <a:pt x="5809672" y="13600"/>
+                </a:lnTo>
+                <a:lnTo>
+                  <a:pt x="5878021" y="11546"/>
+                </a:lnTo>
+                <a:lnTo>
+                  <a:pt x="5946370" y="9757"/>
+                </a:lnTo>
+                <a:lnTo>
+                  <a:pt x="6014720" y="8199"/>
+                </a:lnTo>
+                <a:lnTo>
+                  <a:pt x="6083069" y="6842"/>
+                </a:lnTo>
+                <a:lnTo>
+                  <a:pt x="6151418" y="5660"/>
+                </a:lnTo>
+                <a:lnTo>
+                  <a:pt x="6219767" y="4632"/>
+                </a:lnTo>
+                <a:lnTo>
+                  <a:pt x="6288116" y="3736"/>
+                </a:lnTo>
+                <a:lnTo>
+                  <a:pt x="6356465" y="2957"/>
+                </a:lnTo>
+                <a:lnTo>
+                  <a:pt x="6424814" y="2278"/>
+                </a:lnTo>
+                <a:lnTo>
+                  <a:pt x="6493163" y="1688"/>
+                </a:lnTo>
+                <a:lnTo>
+                  <a:pt x="6561512" y="1174"/>
+                </a:lnTo>
+                <a:lnTo>
+                  <a:pt x="6629861" y="727"/>
+                </a:lnTo>
+                <a:lnTo>
+                  <a:pt x="6698210" y="338"/>
+                </a:lnTo>
+                <a:lnTo>
+                  <a:pt x="6766560" y="0"/>
+                </a:lnTo>
+              </a:path>
+            </a:pathLst>
+          </a:custGeom>
+          <a:noFill/>
+          <a:ln w="38100">
+            <a:solidFill>
+              <a:srgbClr val="8EDBD4"/>
+            </a:solidFill>
+          </a:ln>
+          <a:effectLst/>
+        </p:spPr>
+        <p:txBody>
+          <a:bodyPr rtlCol="0" anchor="ctr"/>
+          <a:lstStyle/>
+          <a:p>
+            <a:pPr algn="ctr"/>
+          </a:p>
+        </p:txBody>
+      </p:sp>
+      <p:sp>
+        <p:nvSpPr>
+          <p:cNvPr id="40" name="A-E16 text 38" descr="sci-ppt:o038"/>
+          <p:cNvSpPr txBox="1"/>
+          <p:nvPr/>
+        </p:nvSpPr>
+        <p:spPr>
+          <a:xfrm>
+            <a:off x="1327041" y="2555965"/>
+            <a:ext cx="2743200" cy="386588"/>
           </a:xfrm>
           <a:prstGeom prst="rect">
+            <a:avLst/>
+          </a:prstGeom>
+          <a:noFill/>
+          <a:effectLst/>
+        </p:spPr>
+        <p:txBody>
+          <a:bodyPr wrap="none" lIns="18288" rIns="18288" tIns="18288" bIns="18288" anchor="t">
+            <a:spAutoFit/>
+          </a:bodyPr>
+          <a:lstStyle/>
+          <a:p>
+            <a:pPr algn="l">
+              <a:spcAft>
+                <a:spcPts val="0"/>
+              </a:spcAft>
+            </a:pPr>
+            <a:r>
+              <a:rPr sz="1100" b="0" i="0">
+                <a:solidFill>
+                  <a:srgbClr val="7FC8F8"/>
+                </a:solidFill>
+                <a:latin typeface="Arial"/>
+              </a:rPr>
+              <a:t>De ≪ 1: the network relaxes during</a:t>
+            </a:r>
+          </a:p>
+          <a:p>
+            <a:pPr algn="l">
+              <a:spcAft>
+                <a:spcPts val="0"/>
+              </a:spcAft>
+            </a:pPr>
+            <a:r>
+              <a:rPr sz="1100" b="0" i="0">
+                <a:solidFill>
+                  <a:srgbClr val="7FC8F8"/>
+                </a:solidFill>
+                <a:latin typeface="Arial"/>
+              </a:rPr>
+              <a:t>the event</a:t>
+            </a:r>
+          </a:p>
+        </p:txBody>
+      </p:sp>
+      <p:sp>
+        <p:nvSpPr>
+          <p:cNvPr id="41" name="A-E16 text 39" descr="sci-ppt:o039"/>
+          <p:cNvSpPr txBox="1"/>
+          <p:nvPr/>
+        </p:nvSpPr>
+        <p:spPr>
+          <a:xfrm>
+            <a:off x="5697180" y="3461657"/>
+            <a:ext cx="1463040" cy="386588"/>
+          </a:xfrm>
+          <a:prstGeom prst="rect">
+            <a:avLst/>
+          </a:prstGeom>
+          <a:noFill/>
+          <a:effectLst/>
+        </p:spPr>
+        <p:txBody>
+          <a:bodyPr wrap="none" lIns="18288" rIns="18288" tIns="18288" bIns="18288" anchor="t">
+            <a:spAutoFit/>
+          </a:bodyPr>
+          <a:lstStyle/>
+          <a:p>
+            <a:pPr algn="l">
+              <a:spcAft>
+                <a:spcPts val="0"/>
+              </a:spcAft>
+            </a:pPr>
+            <a:r>
+              <a:rPr sz="1100" b="0" i="0">
+                <a:solidFill>
+                  <a:srgbClr val="F2B880"/>
+                </a:solidFill>
+                <a:latin typeface="Arial"/>
+              </a:rPr>
+              <a:t>De ≫ 1:</a:t>
+            </a:r>
+          </a:p>
+          <a:p>
+            <a:pPr algn="l">
+              <a:spcAft>
+                <a:spcPts val="0"/>
+              </a:spcAft>
+            </a:pPr>
+            <a:r>
+              <a:rPr sz="1100" b="0" i="0">
+                <a:solidFill>
+                  <a:srgbClr val="F2B880"/>
+                </a:solidFill>
+                <a:latin typeface="Arial"/>
+              </a:rPr>
+              <a:t>solid-like</a:t>
+            </a:r>
+          </a:p>
+        </p:txBody>
+      </p:sp>
+      <p:sp>
+        <p:nvSpPr>
+          <p:cNvPr id="42" name="A-E16 text 40" descr="sci-ppt:o040"/>
+          <p:cNvSpPr txBox="1"/>
+          <p:nvPr/>
+        </p:nvSpPr>
+        <p:spPr>
+          <a:xfrm>
+            <a:off x="3441660" y="4072998"/>
+            <a:ext cx="2011680" cy="216153"/>
+          </a:xfrm>
+          <a:prstGeom prst="rect">
+            <a:avLst/>
+          </a:prstGeom>
+          <a:noFill/>
+          <a:effectLst/>
+        </p:spPr>
+        <p:txBody>
+          <a:bodyPr wrap="none" lIns="18288" rIns="18288" tIns="18288" bIns="18288" anchor="t">
+            <a:spAutoFit/>
+          </a:bodyPr>
+          <a:lstStyle/>
+          <a:p>
+            <a:pPr algn="l">
+              <a:spcAft>
+                <a:spcPts val="0"/>
+              </a:spcAft>
+            </a:pPr>
+            <a:r>
+              <a:rPr sz="1100" b="0" i="0">
+                <a:solidFill>
+                  <a:srgbClr val="8EDBD4"/>
+                </a:solidFill>
+                <a:latin typeface="Arial"/>
+              </a:rPr>
+              <a:t>De ~ 1: both matter</a:t>
+            </a:r>
+          </a:p>
+        </p:txBody>
+      </p:sp>
+      <p:sp>
+        <p:nvSpPr>
+          <p:cNvPr id="43" name="A-E16 round_rect 41" descr="sci-ppt:o041"/>
+          <p:cNvSpPr/>
+          <p:nvPr/>
+        </p:nvSpPr>
+        <p:spPr>
+          <a:xfrm>
+            <a:off x="7955279" y="2103120"/>
+            <a:ext cx="3886200" cy="2377440"/>
+          </a:xfrm>
+          <a:prstGeom prst="roundRect">
             <a:avLst/>
           </a:prstGeom>
           <a:solidFill>
             <a:srgbClr val="213E4B"/>
           </a:solidFill>
-          <a:ln w="17780">
+          <a:ln w="20320">
             <a:solidFill>
-              <a:srgbClr val="B4C7D2"/>
+              <a:srgbClr val="8EDBD4"/>
             </a:solidFill>
           </a:ln>
           <a:effectLst/>
@@ -3210,14 +5128,14 @@
       </p:sp>
       <p:sp>
         <p:nvSpPr>
-          <p:cNvPr id="5" name="text 3" descr="sci-ppt:obj-003"/>
+          <p:cNvPr id="44" name="A-E16 text 42" descr="sci-ppt:o042"/>
           <p:cNvSpPr txBox="1"/>
           <p:nvPr/>
         </p:nvSpPr>
         <p:spPr>
           <a:xfrm>
-            <a:off x="1179576" y="1106424"/>
-            <a:ext cx="6492240" cy="310896"/>
+            <a:off x="8065007" y="2157984"/>
+            <a:ext cx="3666744" cy="247142"/>
           </a:xfrm>
           <a:prstGeom prst="rect">
             <a:avLst/>
@@ -3226,7 +5144,7 @@
           <a:effectLst/>
         </p:spPr>
         <p:txBody>
-          <a:bodyPr wrap="none" lIns="0" rIns="0" tIns="0" bIns="0" anchor="ctr">
+          <a:bodyPr wrap="none" lIns="18288" rIns="18288" tIns="18288" bIns="18288" anchor="t">
             <a:spAutoFit/>
           </a:bodyPr>
           <a:lstStyle/>
@@ -3237,37 +5155,77 @@
               </a:spcAft>
             </a:pPr>
             <a:r>
-              <a:rPr sz="1296" b="0" i="0">
+              <a:rPr sz="1300" b="1" i="0">
+                <a:solidFill>
+                  <a:srgbClr val="8EDBD4"/>
+                </a:solidFill>
+                <a:latin typeface="Arial"/>
+              </a:rPr>
+              <a:t>What decides it</a:t>
+            </a:r>
+          </a:p>
+        </p:txBody>
+      </p:sp>
+      <p:sp>
+        <p:nvSpPr>
+          <p:cNvPr id="45" name="A-E16 text 43" descr="sci-ppt:o043"/>
+          <p:cNvSpPr txBox="1"/>
+          <p:nvPr/>
+        </p:nvSpPr>
+        <p:spPr>
+          <a:xfrm>
+            <a:off x="8293608" y="2560320"/>
+            <a:ext cx="3456432" cy="223900"/>
+          </a:xfrm>
+          <a:prstGeom prst="rect">
+            <a:avLst/>
+          </a:prstGeom>
+          <a:noFill/>
+          <a:effectLst/>
+        </p:spPr>
+        <p:txBody>
+          <a:bodyPr wrap="none" lIns="18288" rIns="18288" tIns="18288" bIns="18288" anchor="t">
+            <a:spAutoFit/>
+          </a:bodyPr>
+          <a:lstStyle/>
+          <a:p>
+            <a:pPr algn="l">
+              <a:spcAft>
+                <a:spcPts val="0"/>
+              </a:spcAft>
+            </a:pPr>
+            <a:r>
+              <a:rPr sz="1150" b="0" i="0">
                 <a:solidFill>
                   <a:srgbClr val="E7F0F3"/>
                 </a:solidFill>
                 <a:latin typeface="Arial"/>
               </a:rPr>
-              <a:t>τe: transient event duration</a:t>
-            </a:r>
-          </a:p>
-        </p:txBody>
-      </p:sp>
-      <p:sp>
-        <p:nvSpPr>
-          <p:cNvPr id="6" name="rect 4" descr="sci-ppt:obj-004"/>
+              <a:t>τᵣₑₗ: how long the network takes to relax.</a:t>
+            </a:r>
+          </a:p>
+        </p:txBody>
+      </p:sp>
+      <p:sp>
+        <p:nvSpPr>
+          <p:cNvPr id="46" name="A-E16 ellipse 44" descr="sci-ppt:o044"/>
           <p:cNvSpPr/>
           <p:nvPr/>
         </p:nvSpPr>
         <p:spPr>
           <a:xfrm>
-            <a:off x="996696" y="1645920"/>
-            <a:ext cx="6766560" cy="347472"/>
-          </a:xfrm>
-          <a:prstGeom prst="rect">
+            <a:off x="8124444" y="2609723"/>
+            <a:ext cx="82296" cy="82296"/>
+          </a:xfrm>
+          <a:prstGeom prst="ellipse">
             <a:avLst/>
           </a:prstGeom>
           <a:solidFill>
-            <a:srgbClr val="213E4B"/>
+            <a:srgbClr val="8EDBD4"/>
           </a:solidFill>
-          <a:ln w="17780">
+          <a:ln w="12700">
             <a:solidFill>
-              <a:srgbClr val="B4C7D2"/>
+              <a:srgbClr val="8EDBD4"/>
             </a:solidFill>
           </a:ln>
           <a:effectLst/>
@@ -3282,14 +5240,14 @@
       </p:sp>
       <p:sp>
         <p:nvSpPr>
-          <p:cNvPr id="7" name="text 5" descr="sci-ppt:obj-005"/>
+          <p:cNvPr id="47" name="A-E16 text 45" descr="sci-ppt:o045"/>
           <p:cNvSpPr txBox="1"/>
           <p:nvPr/>
         </p:nvSpPr>
         <p:spPr>
           <a:xfrm>
-            <a:off x="1179576" y="1682496"/>
-            <a:ext cx="6492240" cy="310896"/>
+            <a:off x="8293608" y="2829940"/>
+            <a:ext cx="3456432" cy="223900"/>
           </a:xfrm>
           <a:prstGeom prst="rect">
             <a:avLst/>
@@ -3298,7 +5256,7 @@
           <a:effectLst/>
         </p:spPr>
         <p:txBody>
-          <a:bodyPr wrap="none" lIns="0" rIns="0" tIns="0" bIns="0" anchor="ctr">
+          <a:bodyPr wrap="none" lIns="18288" rIns="18288" tIns="18288" bIns="18288" anchor="t">
             <a:spAutoFit/>
           </a:bodyPr>
           <a:lstStyle/>
@@ -3309,37 +5267,37 @@
               </a:spcAft>
             </a:pPr>
             <a:r>
-              <a:rPr sz="1296" b="0" i="0">
+              <a:rPr sz="1150" b="0" i="0">
                 <a:solidFill>
                   <a:srgbClr val="E7F0F3"/>
                 </a:solidFill>
                 <a:latin typeface="Arial"/>
               </a:rPr>
-              <a:t>τrel: material stress memory</a:t>
-            </a:r>
-          </a:p>
-        </p:txBody>
-      </p:sp>
-      <p:sp>
-        <p:nvSpPr>
-          <p:cNvPr id="8" name="rect 6" descr="sci-ppt:obj-006"/>
+              <a:t>τₑ: how long the jet or load lasts.</a:t>
+            </a:r>
+          </a:p>
+        </p:txBody>
+      </p:sp>
+      <p:sp>
+        <p:nvSpPr>
+          <p:cNvPr id="48" name="A-E16 ellipse 46" descr="sci-ppt:o046"/>
           <p:cNvSpPr/>
           <p:nvPr/>
         </p:nvSpPr>
         <p:spPr>
           <a:xfrm>
-            <a:off x="996696" y="2221992"/>
-            <a:ext cx="6766560" cy="347472"/>
-          </a:xfrm>
-          <a:prstGeom prst="rect">
+            <a:off x="8124444" y="2879343"/>
+            <a:ext cx="82296" cy="82296"/>
+          </a:xfrm>
+          <a:prstGeom prst="ellipse">
             <a:avLst/>
           </a:prstGeom>
           <a:solidFill>
-            <a:srgbClr val="213E4B"/>
+            <a:srgbClr val="8EDBD4"/>
           </a:solidFill>
-          <a:ln w="17780">
+          <a:ln w="12700">
             <a:solidFill>
-              <a:srgbClr val="B4C7D2"/>
+              <a:srgbClr val="8EDBD4"/>
             </a:solidFill>
           </a:ln>
           <a:effectLst/>
@@ -3354,14 +5312,14 @@
       </p:sp>
       <p:sp>
         <p:nvSpPr>
-          <p:cNvPr id="9" name="text 7" descr="sci-ppt:obj-007"/>
+          <p:cNvPr id="49" name="A-E16 text 47" descr="sci-ppt:o047"/>
           <p:cNvSpPr txBox="1"/>
           <p:nvPr/>
         </p:nvSpPr>
         <p:spPr>
           <a:xfrm>
-            <a:off x="1179576" y="2258568"/>
-            <a:ext cx="6492240" cy="310896"/>
+            <a:off x="8293608" y="3099561"/>
+            <a:ext cx="3456432" cy="402081"/>
           </a:xfrm>
           <a:prstGeom prst="rect">
             <a:avLst/>
@@ -3370,7 +5328,7 @@
           <a:effectLst/>
         </p:spPr>
         <p:txBody>
-          <a:bodyPr wrap="none" lIns="0" rIns="0" tIns="0" bIns="0" anchor="ctr">
+          <a:bodyPr wrap="none" lIns="18288" rIns="18288" tIns="18288" bIns="18288" anchor="t">
             <a:spAutoFit/>
           </a:bodyPr>
           <a:lstStyle/>
@@ -3381,27 +5339,75 @@
               </a:spcAft>
             </a:pPr>
             <a:r>
-              <a:rPr sz="1296" b="0" i="0">
+              <a:rPr sz="1150" b="0" i="0">
                 <a:solidFill>
                   <a:srgbClr val="E7F0F3"/>
                 </a:solidFill>
                 <a:latin typeface="Arial"/>
               </a:rPr>
-              <a:t>De = τrel / τe</a:t>
-            </a:r>
-          </a:p>
-        </p:txBody>
-      </p:sp>
-      <p:sp>
-        <p:nvSpPr>
-          <p:cNvPr id="10" name="text 8" descr="sci-ppt:obj-008"/>
+              <a:t>The ratio, not either time alone, sets the</a:t>
+            </a:r>
+          </a:p>
+          <a:p>
+            <a:pPr algn="l">
+              <a:spcAft>
+                <a:spcPts val="0"/>
+              </a:spcAft>
+            </a:pPr>
+            <a:r>
+              <a:rPr sz="1150" b="0" i="0">
+                <a:solidFill>
+                  <a:srgbClr val="E7F0F3"/>
+                </a:solidFill>
+                <a:latin typeface="Arial"/>
+              </a:rPr>
+              <a:t>behaviour.</a:t>
+            </a:r>
+          </a:p>
+        </p:txBody>
+      </p:sp>
+      <p:sp>
+        <p:nvSpPr>
+          <p:cNvPr id="50" name="A-E16 ellipse 48" descr="sci-ppt:o048"/>
+          <p:cNvSpPr/>
+          <p:nvPr/>
+        </p:nvSpPr>
+        <p:spPr>
+          <a:xfrm>
+            <a:off x="8124444" y="3148964"/>
+            <a:ext cx="82296" cy="82296"/>
+          </a:xfrm>
+          <a:prstGeom prst="ellipse">
+            <a:avLst/>
+          </a:prstGeom>
+          <a:solidFill>
+            <a:srgbClr val="8EDBD4"/>
+          </a:solidFill>
+          <a:ln w="12700">
+            <a:solidFill>
+              <a:srgbClr val="8EDBD4"/>
+            </a:solidFill>
+          </a:ln>
+          <a:effectLst/>
+        </p:spPr>
+        <p:txBody>
+          <a:bodyPr rtlCol="0" anchor="ctr"/>
+          <a:lstStyle/>
+          <a:p>
+            <a:pPr algn="ctr"/>
+          </a:p>
+        </p:txBody>
+      </p:sp>
+      <p:sp>
+        <p:nvSpPr>
+          <p:cNvPr id="51" name="A-E16 text 49" descr="sci-ppt:o049"/>
           <p:cNvSpPr txBox="1"/>
           <p:nvPr/>
         </p:nvSpPr>
         <p:spPr>
           <a:xfrm>
-            <a:off x="1005840" y="2862072"/>
-            <a:ext cx="7680960" cy="310896"/>
+            <a:off x="457200" y="5212080"/>
+            <a:ext cx="11247120" cy="239395"/>
           </a:xfrm>
           <a:prstGeom prst="rect">
             <a:avLst/>
@@ -3410,7 +5416,7 @@
           <a:effectLst/>
         </p:spPr>
         <p:txBody>
-          <a:bodyPr wrap="none" lIns="0" rIns="0" tIns="0" bIns="0" anchor="ctr">
+          <a:bodyPr wrap="none" lIns="18288" rIns="18288" tIns="18288" bIns="18288" anchor="t">
             <a:spAutoFit/>
           </a:bodyPr>
           <a:lstStyle/>
@@ -3421,27 +5427,27 @@
               </a:spcAft>
             </a:pPr>
             <a:r>
-              <a:rPr sz="1152" b="0" i="0">
+              <a:rPr sz="1250" b="0" i="0">
                 <a:solidFill>
                   <a:srgbClr val="E7F0F3"/>
                 </a:solidFill>
                 <a:latin typeface="Arial"/>
               </a:rPr>
-              <a:t>Equal boxes list definitions; lengths do not encode time</a:t>
-            </a:r>
-          </a:p>
-        </p:txBody>
-      </p:sp>
-      <p:sp>
-        <p:nvSpPr>
-          <p:cNvPr id="11" name="text 9" descr="sci-ppt:obj-009"/>
+              <a:t>The event duration determines which part of the network response can act before the jet or load arrives.</a:t>
+            </a:r>
+          </a:p>
+        </p:txBody>
+      </p:sp>
+      <p:sp>
+        <p:nvSpPr>
+          <p:cNvPr id="52" name="A-E16 text 50" descr="sci-ppt:o050"/>
           <p:cNvSpPr txBox="1"/>
           <p:nvPr/>
         </p:nvSpPr>
         <p:spPr>
           <a:xfrm>
-            <a:off x="256032" y="3465576"/>
-            <a:ext cx="7315200" cy="310896"/>
+            <a:off x="457200" y="5760720"/>
+            <a:ext cx="11247120" cy="231648"/>
           </a:xfrm>
           <a:prstGeom prst="rect">
             <a:avLst/>
@@ -3450,7 +5456,7 @@
           <a:effectLst/>
         </p:spPr>
         <p:txBody>
-          <a:bodyPr wrap="none" lIns="0" rIns="0" tIns="0" bIns="0" anchor="ctr">
+          <a:bodyPr wrap="none" lIns="18288" rIns="18288" tIns="18288" bIns="18288" anchor="t">
             <a:spAutoFit/>
           </a:bodyPr>
           <a:lstStyle/>
@@ -3461,27 +5467,27 @@
               </a:spcAft>
             </a:pPr>
             <a:r>
-              <a:rPr sz="1296" b="0" i="0">
+              <a:rPr sz="1200" b="0" i="0">
                 <a:solidFill>
-                  <a:srgbClr val="8EDBD4"/>
+                  <a:srgbClr val="B4C7D2"/>
                 </a:solidFill>
                 <a:latin typeface="Arial"/>
               </a:rPr>
-              <a:t>Variables and physical limits</a:t>
-            </a:r>
-          </a:p>
-        </p:txBody>
-      </p:sp>
-      <p:sp>
-        <p:nvSpPr>
-          <p:cNvPr id="12" name="text 10" descr="sci-ppt:obj-010"/>
+              <a:t>The curve x/(1+x) is a conventional illustration of a Maxwell-type crossover, not a result derived from Eq. A-E16.</a:t>
+            </a:r>
+          </a:p>
+        </p:txBody>
+      </p:sp>
+      <p:sp>
+        <p:nvSpPr>
+          <p:cNvPr id="53" name="A-E16 text 51" descr="sci-ppt:o051"/>
           <p:cNvSpPr txBox="1"/>
           <p:nvPr/>
         </p:nvSpPr>
         <p:spPr>
           <a:xfrm>
-            <a:off x="365760" y="3813048"/>
-            <a:ext cx="8412480" cy="310896"/>
+            <a:off x="320040" y="6510528"/>
+            <a:ext cx="11521440" cy="200660"/>
           </a:xfrm>
           <a:prstGeom prst="rect">
             <a:avLst/>
@@ -3490,7 +5496,7 @@
           <a:effectLst/>
         </p:spPr>
         <p:txBody>
-          <a:bodyPr wrap="none" lIns="0" rIns="0" tIns="0" bIns="0" anchor="ctr">
+          <a:bodyPr wrap="none" lIns="18288" rIns="18288" tIns="18288" bIns="18288" anchor="t">
             <a:spAutoFit/>
           </a:bodyPr>
           <a:lstStyle/>
@@ -3501,173 +5507,13 @@
               </a:spcAft>
             </a:pPr>
             <a:r>
-              <a:rPr sz="1152" b="0" i="0">
+              <a:rPr sz="1000" b="0" i="0">
                 <a:solidFill>
-                  <a:srgbClr val="E7F0F3"/>
+                  <a:srgbClr val="B4C7D2"/>
                 </a:solidFill>
                 <a:latin typeface="Arial"/>
               </a:rPr>
-              <a:t>• τe: cavity/jet duration</a:t>
-            </a:r>
-          </a:p>
-        </p:txBody>
-      </p:sp>
-      <p:sp>
-        <p:nvSpPr>
-          <p:cNvPr id="13" name="text 11" descr="sci-ppt:obj-011"/>
-          <p:cNvSpPr txBox="1"/>
-          <p:nvPr/>
-        </p:nvSpPr>
-        <p:spPr>
-          <a:xfrm>
-            <a:off x="365760" y="4023360"/>
-            <a:ext cx="8412480" cy="310896"/>
-          </a:xfrm>
-          <a:prstGeom prst="rect">
-            <a:avLst/>
-          </a:prstGeom>
-          <a:noFill/>
-          <a:effectLst/>
-        </p:spPr>
-        <p:txBody>
-          <a:bodyPr wrap="none" lIns="0" rIns="0" tIns="0" bIns="0" anchor="ctr">
-            <a:spAutoFit/>
-          </a:bodyPr>
-          <a:lstStyle/>
-          <a:p>
-            <a:pPr algn="l">
-              <a:spcAft>
-                <a:spcPts val="0"/>
-              </a:spcAft>
-            </a:pPr>
-            <a:r>
-              <a:rPr sz="1152" b="0" i="0">
-                <a:solidFill>
-                  <a:srgbClr val="E7F0F3"/>
-                </a:solidFill>
-                <a:latin typeface="Arial"/>
-              </a:rPr>
-              <a:t>• τrel: stress memory</a:t>
-            </a:r>
-          </a:p>
-        </p:txBody>
-      </p:sp>
-      <p:sp>
-        <p:nvSpPr>
-          <p:cNvPr id="14" name="text 12" descr="sci-ppt:obj-012"/>
-          <p:cNvSpPr txBox="1"/>
-          <p:nvPr/>
-        </p:nvSpPr>
-        <p:spPr>
-          <a:xfrm>
-            <a:off x="365760" y="4233672"/>
-            <a:ext cx="8412480" cy="310896"/>
-          </a:xfrm>
-          <a:prstGeom prst="rect">
-            <a:avLst/>
-          </a:prstGeom>
-          <a:noFill/>
-          <a:effectLst/>
-        </p:spPr>
-        <p:txBody>
-          <a:bodyPr wrap="none" lIns="0" rIns="0" tIns="0" bIns="0" anchor="ctr">
-            <a:spAutoFit/>
-          </a:bodyPr>
-          <a:lstStyle/>
-          <a:p>
-            <a:pPr algn="l">
-              <a:spcAft>
-                <a:spcPts val="0"/>
-              </a:spcAft>
-            </a:pPr>
-            <a:r>
-              <a:rPr sz="1152" b="0" i="0">
-                <a:solidFill>
-                  <a:srgbClr val="E7F0F3"/>
-                </a:solidFill>
-                <a:latin typeface="Arial"/>
-              </a:rPr>
-              <a:t>• De = τrel/τe</a:t>
-            </a:r>
-          </a:p>
-        </p:txBody>
-      </p:sp>
-      <p:sp>
-        <p:nvSpPr>
-          <p:cNvPr id="15" name="text 13" descr="sci-ppt:obj-013"/>
-          <p:cNvSpPr txBox="1"/>
-          <p:nvPr/>
-        </p:nvSpPr>
-        <p:spPr>
-          <a:xfrm>
-            <a:off x="365760" y="4443984"/>
-            <a:ext cx="8412480" cy="310896"/>
-          </a:xfrm>
-          <a:prstGeom prst="rect">
-            <a:avLst/>
-          </a:prstGeom>
-          <a:noFill/>
-          <a:effectLst/>
-        </p:spPr>
-        <p:txBody>
-          <a:bodyPr wrap="none" lIns="0" rIns="0" tIns="0" bIns="0" anchor="ctr">
-            <a:spAutoFit/>
-          </a:bodyPr>
-          <a:lstStyle/>
-          <a:p>
-            <a:pPr algn="l">
-              <a:spcAft>
-                <a:spcPts val="0"/>
-              </a:spcAft>
-            </a:pPr>
-            <a:r>
-              <a:rPr sz="1152" b="0" i="0">
-                <a:solidFill>
-                  <a:srgbClr val="E7F0F3"/>
-                </a:solidFill>
-                <a:latin typeface="Arial"/>
-              </a:rPr>
-              <a:t>Memory persistence differs from stiffness</a:t>
-            </a:r>
-          </a:p>
-        </p:txBody>
-      </p:sp>
-      <p:sp>
-        <p:nvSpPr>
-          <p:cNvPr id="16" name="text 14" descr="sci-ppt:obj-014"/>
-          <p:cNvSpPr txBox="1"/>
-          <p:nvPr/>
-        </p:nvSpPr>
-        <p:spPr>
-          <a:xfrm>
-            <a:off x="365760" y="4654296"/>
-            <a:ext cx="8412480" cy="310896"/>
-          </a:xfrm>
-          <a:prstGeom prst="rect">
-            <a:avLst/>
-          </a:prstGeom>
-          <a:noFill/>
-          <a:effectLst/>
-        </p:spPr>
-        <p:txBody>
-          <a:bodyPr wrap="none" lIns="0" rIns="0" tIns="0" bIns="0" anchor="ctr">
-            <a:spAutoFit/>
-          </a:bodyPr>
-          <a:lstStyle/>
-          <a:p>
-            <a:pPr algn="l">
-              <a:spcAft>
-                <a:spcPts val="0"/>
-              </a:spcAft>
-            </a:pPr>
-            <a:r>
-              <a:rPr sz="1152" b="0" i="0">
-                <a:solidFill>
-                  <a:srgbClr val="E7F0F3"/>
-                </a:solidFill>
-                <a:latin typeface="Arial"/>
-              </a:rPr>
-              <a:t>Use the actual transient event</a:t>
+              <a:t>Definition of Eq. A-E16; the share curve is illustrative only.</a:t>
             </a:r>
           </a:p>
         </p:txBody>
